--- a/Upload Slides/CSC481-681 - L05_1 Public Key Cryptography.pptx
+++ b/Upload Slides/CSC481-681 - L05_1 Public Key Cryptography.pptx
@@ -42316,6 +42316,534 @@
           </p:sp>
         </mc:Fallback>
       </mc:AlternateContent>
+      <mc:AlternateContent xmlns:mc="http://schemas.openxmlformats.org/markup-compatibility/2006">
+        <mc:Choice xmlns:a14="http://schemas.microsoft.com/office/drawing/2010/main" Requires="a14">
+          <p:sp>
+            <p:nvSpPr>
+              <p:cNvPr id="2" name="TextBox 1">
+                <a:extLst>
+                  <a:ext uri="{FF2B5EF4-FFF2-40B4-BE49-F238E27FC236}">
+                    <a16:creationId xmlns:a16="http://schemas.microsoft.com/office/drawing/2014/main" id="{9EF09690-D824-CBF2-8102-BDB8BF9D371D}"/>
+                  </a:ext>
+                </a:extLst>
+              </p:cNvPr>
+              <p:cNvSpPr txBox="1"/>
+              <p:nvPr/>
+            </p:nvSpPr>
+            <p:spPr>
+              <a:xfrm>
+                <a:off x="3296149" y="2510332"/>
+                <a:ext cx="1451936" cy="215444"/>
+              </a:xfrm>
+              <a:prstGeom prst="rect">
+                <a:avLst/>
+              </a:prstGeom>
+              <a:noFill/>
+            </p:spPr>
+            <p:txBody>
+              <a:bodyPr wrap="none" lIns="0" tIns="0" rIns="0" bIns="0" rtlCol="0">
+                <a:spAutoFit/>
+              </a:bodyPr>
+              <a:lstStyle/>
+              <a:p>
+                <a:pPr/>
+                <a14:m>
+                  <m:oMathPara xmlns:m="http://schemas.openxmlformats.org/officeDocument/2006/math">
+                    <m:oMathParaPr>
+                      <m:jc m:val="centerGroup"/>
+                    </m:oMathParaPr>
+                    <m:oMath xmlns:m="http://schemas.openxmlformats.org/officeDocument/2006/math">
+                      <m:r>
+                        <a:rPr lang="en-US" b="0" i="1" smtClean="0">
+                          <a:latin typeface="Cambria Math" panose="02040503050406030204" pitchFamily="18" charset="0"/>
+                        </a:rPr>
+                        <m:t>𝐴</m:t>
+                      </m:r>
+                      <m:r>
+                        <a:rPr lang="en-US" b="0" i="1" smtClean="0">
+                          <a:latin typeface="Cambria Math" panose="02040503050406030204" pitchFamily="18" charset="0"/>
+                        </a:rPr>
+                        <m:t>=</m:t>
+                      </m:r>
+                      <m:sSup>
+                        <m:sSupPr>
+                          <m:ctrlPr>
+                            <a:rPr lang="en-US" b="0" i="1" smtClean="0">
+                              <a:latin typeface="Cambria Math" panose="02040503050406030204" pitchFamily="18" charset="0"/>
+                            </a:rPr>
+                          </m:ctrlPr>
+                        </m:sSupPr>
+                        <m:e>
+                          <m:r>
+                            <a:rPr lang="en-US" b="0" i="1" smtClean="0">
+                              <a:latin typeface="Cambria Math" panose="02040503050406030204" pitchFamily="18" charset="0"/>
+                            </a:rPr>
+                            <m:t>2</m:t>
+                          </m:r>
+                        </m:e>
+                        <m:sup>
+                          <m:r>
+                            <a:rPr lang="en-US" b="0" i="1" smtClean="0">
+                              <a:latin typeface="Cambria Math" panose="02040503050406030204" pitchFamily="18" charset="0"/>
+                            </a:rPr>
+                            <m:t>8</m:t>
+                          </m:r>
+                        </m:sup>
+                      </m:sSup>
+                      <m:r>
+                        <a:rPr lang="en-US" b="0" i="1" smtClean="0">
+                          <a:latin typeface="Cambria Math" panose="02040503050406030204" pitchFamily="18" charset="0"/>
+                        </a:rPr>
+                        <m:t> </m:t>
+                      </m:r>
+                      <m:r>
+                        <a:rPr lang="en-US" b="0" i="1" smtClean="0">
+                          <a:latin typeface="Cambria Math" panose="02040503050406030204" pitchFamily="18" charset="0"/>
+                        </a:rPr>
+                        <m:t>𝑚𝑜𝑑</m:t>
+                      </m:r>
+                      <m:r>
+                        <a:rPr lang="en-US" b="0" i="1" smtClean="0">
+                          <a:latin typeface="Cambria Math" panose="02040503050406030204" pitchFamily="18" charset="0"/>
+                        </a:rPr>
+                        <m:t> 5=1</m:t>
+                      </m:r>
+                    </m:oMath>
+                  </m:oMathPara>
+                </a14:m>
+                <a:endParaRPr lang="en-US" b="0" dirty="0"/>
+              </a:p>
+            </p:txBody>
+          </p:sp>
+        </mc:Choice>
+        <mc:Fallback>
+          <p:sp>
+            <p:nvSpPr>
+              <p:cNvPr id="2" name="TextBox 1">
+                <a:extLst>
+                  <a:ext uri="{FF2B5EF4-FFF2-40B4-BE49-F238E27FC236}">
+                    <a16:creationId xmlns:a16="http://schemas.microsoft.com/office/drawing/2014/main" id="{9EF09690-D824-CBF2-8102-BDB8BF9D371D}"/>
+                  </a:ext>
+                </a:extLst>
+              </p:cNvPr>
+              <p:cNvSpPr txBox="1">
+                <a:spLocks noRot="1" noChangeAspect="1" noMove="1" noResize="1" noEditPoints="1" noAdjustHandles="1" noChangeArrowheads="1" noChangeShapeType="1" noTextEdit="1"/>
+              </p:cNvSpPr>
+              <p:nvPr/>
+            </p:nvSpPr>
+            <p:spPr>
+              <a:xfrm>
+                <a:off x="3296149" y="2510332"/>
+                <a:ext cx="1451936" cy="215444"/>
+              </a:xfrm>
+              <a:prstGeom prst="rect">
+                <a:avLst/>
+              </a:prstGeom>
+              <a:blipFill>
+                <a:blip r:embed="rId4"/>
+                <a:stretch>
+                  <a:fillRect l="-2101" r="-2101" b="-8571"/>
+                </a:stretch>
+              </a:blipFill>
+            </p:spPr>
+            <p:txBody>
+              <a:bodyPr/>
+              <a:lstStyle/>
+              <a:p>
+                <a:r>
+                  <a:rPr lang="en-US">
+                    <a:noFill/>
+                  </a:rPr>
+                  <a:t> </a:t>
+                </a:r>
+              </a:p>
+            </p:txBody>
+          </p:sp>
+        </mc:Fallback>
+      </mc:AlternateContent>
+      <mc:AlternateContent xmlns:mc="http://schemas.openxmlformats.org/markup-compatibility/2006">
+        <mc:Choice xmlns:a14="http://schemas.microsoft.com/office/drawing/2010/main" Requires="a14">
+          <p:sp>
+            <p:nvSpPr>
+              <p:cNvPr id="3" name="TextBox 2">
+                <a:extLst>
+                  <a:ext uri="{FF2B5EF4-FFF2-40B4-BE49-F238E27FC236}">
+                    <a16:creationId xmlns:a16="http://schemas.microsoft.com/office/drawing/2014/main" id="{8E7A00E4-7978-64BB-3FFA-1249CE95712E}"/>
+                  </a:ext>
+                </a:extLst>
+              </p:cNvPr>
+              <p:cNvSpPr txBox="1"/>
+              <p:nvPr/>
+            </p:nvSpPr>
+            <p:spPr>
+              <a:xfrm>
+                <a:off x="3296149" y="2976491"/>
+                <a:ext cx="1531317" cy="215444"/>
+              </a:xfrm>
+              <a:prstGeom prst="rect">
+                <a:avLst/>
+              </a:prstGeom>
+              <a:noFill/>
+            </p:spPr>
+            <p:txBody>
+              <a:bodyPr wrap="none" lIns="0" tIns="0" rIns="0" bIns="0" rtlCol="0">
+                <a:spAutoFit/>
+              </a:bodyPr>
+              <a:lstStyle/>
+              <a:p>
+                <a:pPr/>
+                <a14:m>
+                  <m:oMathPara xmlns:m="http://schemas.openxmlformats.org/officeDocument/2006/math">
+                    <m:oMathParaPr>
+                      <m:jc m:val="centerGroup"/>
+                    </m:oMathParaPr>
+                    <m:oMath xmlns:m="http://schemas.openxmlformats.org/officeDocument/2006/math">
+                      <m:r>
+                        <a:rPr lang="en-US" b="0" i="1" smtClean="0">
+                          <a:latin typeface="Cambria Math" panose="02040503050406030204" pitchFamily="18" charset="0"/>
+                        </a:rPr>
+                        <m:t>𝐵</m:t>
+                      </m:r>
+                      <m:r>
+                        <a:rPr lang="en-US" b="0" i="1" smtClean="0">
+                          <a:latin typeface="Cambria Math" panose="02040503050406030204" pitchFamily="18" charset="0"/>
+                        </a:rPr>
+                        <m:t>=</m:t>
+                      </m:r>
+                      <m:sSup>
+                        <m:sSupPr>
+                          <m:ctrlPr>
+                            <a:rPr lang="en-US" b="0" i="1" smtClean="0">
+                              <a:latin typeface="Cambria Math" panose="02040503050406030204" pitchFamily="18" charset="0"/>
+                            </a:rPr>
+                          </m:ctrlPr>
+                        </m:sSupPr>
+                        <m:e>
+                          <m:r>
+                            <a:rPr lang="en-US" b="0" i="1" smtClean="0">
+                              <a:latin typeface="Cambria Math" panose="02040503050406030204" pitchFamily="18" charset="0"/>
+                            </a:rPr>
+                            <m:t>2</m:t>
+                          </m:r>
+                        </m:e>
+                        <m:sup>
+                          <m:r>
+                            <a:rPr lang="en-US" b="0" i="1" smtClean="0">
+                              <a:latin typeface="Cambria Math" panose="02040503050406030204" pitchFamily="18" charset="0"/>
+                            </a:rPr>
+                            <m:t>13</m:t>
+                          </m:r>
+                        </m:sup>
+                      </m:sSup>
+                      <m:r>
+                        <a:rPr lang="en-US" b="0" i="1" smtClean="0">
+                          <a:latin typeface="Cambria Math" panose="02040503050406030204" pitchFamily="18" charset="0"/>
+                        </a:rPr>
+                        <m:t> </m:t>
+                      </m:r>
+                      <m:r>
+                        <a:rPr lang="en-US" b="0" i="1" smtClean="0">
+                          <a:latin typeface="Cambria Math" panose="02040503050406030204" pitchFamily="18" charset="0"/>
+                        </a:rPr>
+                        <m:t>𝑚𝑜𝑑</m:t>
+                      </m:r>
+                      <m:r>
+                        <a:rPr lang="en-US" b="0" i="1" smtClean="0">
+                          <a:latin typeface="Cambria Math" panose="02040503050406030204" pitchFamily="18" charset="0"/>
+                        </a:rPr>
+                        <m:t> 5=2</m:t>
+                      </m:r>
+                    </m:oMath>
+                  </m:oMathPara>
+                </a14:m>
+                <a:endParaRPr lang="en-US" dirty="0"/>
+              </a:p>
+            </p:txBody>
+          </p:sp>
+        </mc:Choice>
+        <mc:Fallback>
+          <p:sp>
+            <p:nvSpPr>
+              <p:cNvPr id="3" name="TextBox 2">
+                <a:extLst>
+                  <a:ext uri="{FF2B5EF4-FFF2-40B4-BE49-F238E27FC236}">
+                    <a16:creationId xmlns:a16="http://schemas.microsoft.com/office/drawing/2014/main" id="{8E7A00E4-7978-64BB-3FFA-1249CE95712E}"/>
+                  </a:ext>
+                </a:extLst>
+              </p:cNvPr>
+              <p:cNvSpPr txBox="1">
+                <a:spLocks noRot="1" noChangeAspect="1" noMove="1" noResize="1" noEditPoints="1" noAdjustHandles="1" noChangeArrowheads="1" noChangeShapeType="1" noTextEdit="1"/>
+              </p:cNvSpPr>
+              <p:nvPr/>
+            </p:nvSpPr>
+            <p:spPr>
+              <a:xfrm>
+                <a:off x="3296149" y="2976491"/>
+                <a:ext cx="1531317" cy="215444"/>
+              </a:xfrm>
+              <a:prstGeom prst="rect">
+                <a:avLst/>
+              </a:prstGeom>
+              <a:blipFill>
+                <a:blip r:embed="rId5"/>
+                <a:stretch>
+                  <a:fillRect l="-1992" r="-1992" b="-8333"/>
+                </a:stretch>
+              </a:blipFill>
+            </p:spPr>
+            <p:txBody>
+              <a:bodyPr/>
+              <a:lstStyle/>
+              <a:p>
+                <a:r>
+                  <a:rPr lang="en-US">
+                    <a:noFill/>
+                  </a:rPr>
+                  <a:t> </a:t>
+                </a:r>
+              </a:p>
+            </p:txBody>
+          </p:sp>
+        </mc:Fallback>
+      </mc:AlternateContent>
+      <mc:AlternateContent xmlns:mc="http://schemas.openxmlformats.org/markup-compatibility/2006">
+        <mc:Choice xmlns:a14="http://schemas.microsoft.com/office/drawing/2010/main" Requires="a14">
+          <p:sp>
+            <p:nvSpPr>
+              <p:cNvPr id="5" name="TextBox 4">
+                <a:extLst>
+                  <a:ext uri="{FF2B5EF4-FFF2-40B4-BE49-F238E27FC236}">
+                    <a16:creationId xmlns:a16="http://schemas.microsoft.com/office/drawing/2014/main" id="{DF465A4C-E8C3-B9F9-D63A-627373B73A70}"/>
+                  </a:ext>
+                </a:extLst>
+              </p:cNvPr>
+              <p:cNvSpPr txBox="1"/>
+              <p:nvPr/>
+            </p:nvSpPr>
+            <p:spPr>
+              <a:xfrm>
+                <a:off x="2566526" y="3442650"/>
+                <a:ext cx="2990562" cy="215444"/>
+              </a:xfrm>
+              <a:prstGeom prst="rect">
+                <a:avLst/>
+              </a:prstGeom>
+              <a:noFill/>
+            </p:spPr>
+            <p:txBody>
+              <a:bodyPr wrap="none" lIns="0" tIns="0" rIns="0" bIns="0" rtlCol="0">
+                <a:spAutoFit/>
+              </a:bodyPr>
+              <a:lstStyle/>
+              <a:p>
+                <a:pPr/>
+                <a14:m>
+                  <m:oMathPara xmlns:m="http://schemas.openxmlformats.org/officeDocument/2006/math">
+                    <m:oMathParaPr>
+                      <m:jc m:val="centerGroup"/>
+                    </m:oMathParaPr>
+                    <m:oMath xmlns:m="http://schemas.openxmlformats.org/officeDocument/2006/math">
+                      <m:sSub>
+                        <m:sSubPr>
+                          <m:ctrlPr>
+                            <a:rPr lang="en-US" i="1" smtClean="0">
+                              <a:latin typeface="Cambria Math" panose="02040503050406030204" pitchFamily="18" charset="0"/>
+                            </a:rPr>
+                          </m:ctrlPr>
+                        </m:sSubPr>
+                        <m:e>
+                          <m:r>
+                            <a:rPr lang="en-US" b="0" i="1" smtClean="0">
+                              <a:latin typeface="Cambria Math" panose="02040503050406030204" pitchFamily="18" charset="0"/>
+                            </a:rPr>
+                            <m:t>𝑆</m:t>
+                          </m:r>
+                        </m:e>
+                        <m:sub>
+                          <m:r>
+                            <a:rPr lang="en-US" b="0" i="1" smtClean="0">
+                              <a:latin typeface="Cambria Math" panose="02040503050406030204" pitchFamily="18" charset="0"/>
+                            </a:rPr>
+                            <m:t>𝑎</m:t>
+                          </m:r>
+                        </m:sub>
+                      </m:sSub>
+                      <m:r>
+                        <a:rPr lang="en-US" b="0" i="1" smtClean="0">
+                          <a:latin typeface="Cambria Math" panose="02040503050406030204" pitchFamily="18" charset="0"/>
+                        </a:rPr>
+                        <m:t>=</m:t>
+                      </m:r>
+                      <m:sSub>
+                        <m:sSubPr>
+                          <m:ctrlPr>
+                            <a:rPr lang="en-US" b="0" i="1" smtClean="0">
+                              <a:latin typeface="Cambria Math" panose="02040503050406030204" pitchFamily="18" charset="0"/>
+                            </a:rPr>
+                          </m:ctrlPr>
+                        </m:sSubPr>
+                        <m:e>
+                          <m:r>
+                            <a:rPr lang="en-US" b="0" i="1" smtClean="0">
+                              <a:latin typeface="Cambria Math" panose="02040503050406030204" pitchFamily="18" charset="0"/>
+                            </a:rPr>
+                            <m:t>𝑆</m:t>
+                          </m:r>
+                        </m:e>
+                        <m:sub>
+                          <m:r>
+                            <a:rPr lang="en-US" b="0" i="1" smtClean="0">
+                              <a:latin typeface="Cambria Math" panose="02040503050406030204" pitchFamily="18" charset="0"/>
+                            </a:rPr>
+                            <m:t>𝑏</m:t>
+                          </m:r>
+                        </m:sub>
+                      </m:sSub>
+                      <m:r>
+                        <a:rPr lang="en-US" b="0" i="1" smtClean="0">
+                          <a:latin typeface="Cambria Math" panose="02040503050406030204" pitchFamily="18" charset="0"/>
+                        </a:rPr>
+                        <m:t>=</m:t>
+                      </m:r>
+                      <m:sSup>
+                        <m:sSupPr>
+                          <m:ctrlPr>
+                            <a:rPr lang="en-US" b="0" i="1" smtClean="0">
+                              <a:latin typeface="Cambria Math" panose="02040503050406030204" pitchFamily="18" charset="0"/>
+                            </a:rPr>
+                          </m:ctrlPr>
+                        </m:sSupPr>
+                        <m:e>
+                          <m:r>
+                            <a:rPr lang="en-US" b="0" i="1" smtClean="0">
+                              <a:latin typeface="Cambria Math" panose="02040503050406030204" pitchFamily="18" charset="0"/>
+                            </a:rPr>
+                            <m:t>2</m:t>
+                          </m:r>
+                        </m:e>
+                        <m:sup>
+                          <m:r>
+                            <a:rPr lang="en-US" b="0" i="1" smtClean="0">
+                              <a:latin typeface="Cambria Math" panose="02040503050406030204" pitchFamily="18" charset="0"/>
+                            </a:rPr>
+                            <m:t>8</m:t>
+                          </m:r>
+                        </m:sup>
+                      </m:sSup>
+                      <m:r>
+                        <a:rPr lang="en-US" b="0" i="1" smtClean="0">
+                          <a:latin typeface="Cambria Math" panose="02040503050406030204" pitchFamily="18" charset="0"/>
+                        </a:rPr>
+                        <m:t> </m:t>
+                      </m:r>
+                      <m:r>
+                        <a:rPr lang="en-US" b="0" i="1" smtClean="0">
+                          <a:latin typeface="Cambria Math" panose="02040503050406030204" pitchFamily="18" charset="0"/>
+                        </a:rPr>
+                        <m:t>𝑚𝑜𝑑</m:t>
+                      </m:r>
+                      <m:r>
+                        <a:rPr lang="en-US" b="0" i="1" smtClean="0">
+                          <a:latin typeface="Cambria Math" panose="02040503050406030204" pitchFamily="18" charset="0"/>
+                        </a:rPr>
+                        <m:t> 5= </m:t>
+                      </m:r>
+                      <m:sSup>
+                        <m:sSupPr>
+                          <m:ctrlPr>
+                            <a:rPr lang="en-US" b="0" i="1" smtClean="0">
+                              <a:latin typeface="Cambria Math" panose="02040503050406030204" pitchFamily="18" charset="0"/>
+                            </a:rPr>
+                          </m:ctrlPr>
+                        </m:sSupPr>
+                        <m:e>
+                          <m:r>
+                            <a:rPr lang="en-US" b="0" i="1" smtClean="0">
+                              <a:latin typeface="Cambria Math" panose="02040503050406030204" pitchFamily="18" charset="0"/>
+                            </a:rPr>
+                            <m:t>1</m:t>
+                          </m:r>
+                        </m:e>
+                        <m:sup>
+                          <m:r>
+                            <a:rPr lang="en-US" b="0" i="1" smtClean="0">
+                              <a:latin typeface="Cambria Math" panose="02040503050406030204" pitchFamily="18" charset="0"/>
+                            </a:rPr>
+                            <m:t>13</m:t>
+                          </m:r>
+                        </m:sup>
+                      </m:sSup>
+                      <m:r>
+                        <a:rPr lang="en-US" b="0" i="1" smtClean="0">
+                          <a:latin typeface="Cambria Math" panose="02040503050406030204" pitchFamily="18" charset="0"/>
+                        </a:rPr>
+                        <m:t> </m:t>
+                      </m:r>
+                      <m:r>
+                        <a:rPr lang="en-US" b="0" i="1" smtClean="0">
+                          <a:latin typeface="Cambria Math" panose="02040503050406030204" pitchFamily="18" charset="0"/>
+                        </a:rPr>
+                        <m:t>𝑚𝑜𝑑</m:t>
+                      </m:r>
+                      <m:r>
+                        <a:rPr lang="en-US" b="0" i="1" smtClean="0">
+                          <a:latin typeface="Cambria Math" panose="02040503050406030204" pitchFamily="18" charset="0"/>
+                        </a:rPr>
+                        <m:t> 5=1</m:t>
+                      </m:r>
+                    </m:oMath>
+                  </m:oMathPara>
+                </a14:m>
+                <a:endParaRPr lang="en-US" dirty="0"/>
+              </a:p>
+            </p:txBody>
+          </p:sp>
+        </mc:Choice>
+        <mc:Fallback>
+          <p:sp>
+            <p:nvSpPr>
+              <p:cNvPr id="5" name="TextBox 4">
+                <a:extLst>
+                  <a:ext uri="{FF2B5EF4-FFF2-40B4-BE49-F238E27FC236}">
+                    <a16:creationId xmlns:a16="http://schemas.microsoft.com/office/drawing/2014/main" id="{DF465A4C-E8C3-B9F9-D63A-627373B73A70}"/>
+                  </a:ext>
+                </a:extLst>
+              </p:cNvPr>
+              <p:cNvSpPr txBox="1">
+                <a:spLocks noRot="1" noChangeAspect="1" noMove="1" noResize="1" noEditPoints="1" noAdjustHandles="1" noChangeArrowheads="1" noChangeShapeType="1" noTextEdit="1"/>
+              </p:cNvSpPr>
+              <p:nvPr/>
+            </p:nvSpPr>
+            <p:spPr>
+              <a:xfrm>
+                <a:off x="2566526" y="3442650"/>
+                <a:ext cx="2990562" cy="215444"/>
+              </a:xfrm>
+              <a:prstGeom prst="rect">
+                <a:avLst/>
+              </a:prstGeom>
+              <a:blipFill>
+                <a:blip r:embed="rId6"/>
+                <a:stretch>
+                  <a:fillRect l="-815" r="-611" b="-17143"/>
+                </a:stretch>
+              </a:blipFill>
+            </p:spPr>
+            <p:txBody>
+              <a:bodyPr/>
+              <a:lstStyle/>
+              <a:p>
+                <a:r>
+                  <a:rPr lang="en-US">
+                    <a:noFill/>
+                  </a:rPr>
+                  <a:t> </a:t>
+                </a:r>
+              </a:p>
+            </p:txBody>
+          </p:sp>
+        </mc:Fallback>
+      </mc:AlternateContent>
     </p:spTree>
     <p:extLst>
       <p:ext uri="{BB962C8B-B14F-4D97-AF65-F5344CB8AC3E}">
@@ -42326,6 +42854,164 @@
   <p:clrMapOvr>
     <a:masterClrMapping/>
   </p:clrMapOvr>
+  <p:timing>
+    <p:tnLst>
+      <p:par>
+        <p:cTn id="1" dur="indefinite" restart="never" nodeType="tmRoot">
+          <p:childTnLst>
+            <p:seq concurrent="1" nextAc="seek">
+              <p:cTn id="2" dur="indefinite" nodeType="mainSeq">
+                <p:childTnLst>
+                  <p:par>
+                    <p:cTn id="3" fill="hold">
+                      <p:stCondLst>
+                        <p:cond delay="indefinite"/>
+                      </p:stCondLst>
+                      <p:childTnLst>
+                        <p:par>
+                          <p:cTn id="4" fill="hold">
+                            <p:stCondLst>
+                              <p:cond delay="0"/>
+                            </p:stCondLst>
+                            <p:childTnLst>
+                              <p:par>
+                                <p:cTn id="5" presetID="10" presetClass="entr" presetSubtype="0" fill="hold" grpId="0" nodeType="clickEffect">
+                                  <p:stCondLst>
+                                    <p:cond delay="0"/>
+                                  </p:stCondLst>
+                                  <p:childTnLst>
+                                    <p:set>
+                                      <p:cBhvr>
+                                        <p:cTn id="6" dur="1" fill="hold">
+                                          <p:stCondLst>
+                                            <p:cond delay="0"/>
+                                          </p:stCondLst>
+                                        </p:cTn>
+                                        <p:tgtEl>
+                                          <p:spTgt spid="2"/>
+                                        </p:tgtEl>
+                                        <p:attrNameLst>
+                                          <p:attrName>style.visibility</p:attrName>
+                                        </p:attrNameLst>
+                                      </p:cBhvr>
+                                      <p:to>
+                                        <p:strVal val="visible"/>
+                                      </p:to>
+                                    </p:set>
+                                    <p:animEffect transition="in" filter="fade">
+                                      <p:cBhvr>
+                                        <p:cTn id="7" dur="500"/>
+                                        <p:tgtEl>
+                                          <p:spTgt spid="2"/>
+                                        </p:tgtEl>
+                                      </p:cBhvr>
+                                    </p:animEffect>
+                                  </p:childTnLst>
+                                </p:cTn>
+                              </p:par>
+                              <p:par>
+                                <p:cTn id="8" presetID="10" presetClass="entr" presetSubtype="0" fill="hold" grpId="0" nodeType="withEffect">
+                                  <p:stCondLst>
+                                    <p:cond delay="0"/>
+                                  </p:stCondLst>
+                                  <p:childTnLst>
+                                    <p:set>
+                                      <p:cBhvr>
+                                        <p:cTn id="9" dur="1" fill="hold">
+                                          <p:stCondLst>
+                                            <p:cond delay="0"/>
+                                          </p:stCondLst>
+                                        </p:cTn>
+                                        <p:tgtEl>
+                                          <p:spTgt spid="3"/>
+                                        </p:tgtEl>
+                                        <p:attrNameLst>
+                                          <p:attrName>style.visibility</p:attrName>
+                                        </p:attrNameLst>
+                                      </p:cBhvr>
+                                      <p:to>
+                                        <p:strVal val="visible"/>
+                                      </p:to>
+                                    </p:set>
+                                    <p:animEffect transition="in" filter="fade">
+                                      <p:cBhvr>
+                                        <p:cTn id="10" dur="500"/>
+                                        <p:tgtEl>
+                                          <p:spTgt spid="3"/>
+                                        </p:tgtEl>
+                                      </p:cBhvr>
+                                    </p:animEffect>
+                                  </p:childTnLst>
+                                </p:cTn>
+                              </p:par>
+                              <p:par>
+                                <p:cTn id="11" presetID="10" presetClass="entr" presetSubtype="0" fill="hold" grpId="0" nodeType="withEffect">
+                                  <p:stCondLst>
+                                    <p:cond delay="0"/>
+                                  </p:stCondLst>
+                                  <p:childTnLst>
+                                    <p:set>
+                                      <p:cBhvr>
+                                        <p:cTn id="12" dur="1" fill="hold">
+                                          <p:stCondLst>
+                                            <p:cond delay="0"/>
+                                          </p:stCondLst>
+                                        </p:cTn>
+                                        <p:tgtEl>
+                                          <p:spTgt spid="5"/>
+                                        </p:tgtEl>
+                                        <p:attrNameLst>
+                                          <p:attrName>style.visibility</p:attrName>
+                                        </p:attrNameLst>
+                                      </p:cBhvr>
+                                      <p:to>
+                                        <p:strVal val="visible"/>
+                                      </p:to>
+                                    </p:set>
+                                    <p:animEffect transition="in" filter="fade">
+                                      <p:cBhvr>
+                                        <p:cTn id="13" dur="500"/>
+                                        <p:tgtEl>
+                                          <p:spTgt spid="5"/>
+                                        </p:tgtEl>
+                                      </p:cBhvr>
+                                    </p:animEffect>
+                                  </p:childTnLst>
+                                </p:cTn>
+                              </p:par>
+                            </p:childTnLst>
+                          </p:cTn>
+                        </p:par>
+                      </p:childTnLst>
+                    </p:cTn>
+                  </p:par>
+                </p:childTnLst>
+              </p:cTn>
+              <p:prevCondLst>
+                <p:cond evt="onPrev" delay="0">
+                  <p:tgtEl>
+                    <p:sldTgt/>
+                  </p:tgtEl>
+                </p:cond>
+              </p:prevCondLst>
+              <p:nextCondLst>
+                <p:cond evt="onNext" delay="0">
+                  <p:tgtEl>
+                    <p:sldTgt/>
+                  </p:tgtEl>
+                </p:cond>
+              </p:nextCondLst>
+            </p:seq>
+          </p:childTnLst>
+        </p:cTn>
+      </p:par>
+    </p:tnLst>
+    <p:bldLst>
+      <p:bldP spid="2" grpId="0"/>
+      <p:bldP spid="3" grpId="0"/>
+      <p:bldP spid="5" grpId="0"/>
+    </p:bldLst>
+  </p:timing>
 </p:sld>
 </file>
 
